--- a/courseware/DSA_CH03_Stack_Queue.pptx
+++ b/courseware/DSA_CH03_Stack_Queue.pptx
@@ -20469,7 +20469,7 @@
                 <a:latin typeface="Segoe UI"/>
                 <a:ea typeface="微软雅黑"/>
               </a:rPr>
-              <a:t>345 道</a:t>
+              <a:t>344 道</a:t>
             </a:r>
             <a:r>
               <a:rPr sz="1900" b="0" i="0">
